--- a/canvas_material/lectures/powerpoint/Session18-SizeFitOrder.pptx
+++ b/canvas_material/lectures/powerpoint/Session18-SizeFitOrder.pptx
@@ -9941,7 +9941,7 @@
                 <a:ea typeface="Calibri" pitchFamily="34" charset="-122"/>
                 <a:cs typeface="Calibri" pitchFamily="34" charset="-120"/>
               </a:rPr>
-              <a:t>Board ⋯ → Settings → + New field → Single select, XS to XL. Or your own scheme, with its reason in CONTRIBUTING.</a:t>
+              <a:t>New view → Table; + → Add field → Create a project field → Single select, XS to XL. Or your own scheme, with its reason.</a:t>
             </a:r>
             <a:endParaRPr lang="en-US" sz="1550" dirty="0"/>
           </a:p>
@@ -16900,7 +16900,7 @@
                 <a:ea typeface="Calibri" pitchFamily="34" charset="-122"/>
                 <a:cs typeface="Calibri" pitchFamily="34" charset="-120"/>
               </a:rPr>
-              <a:t>⋯ → Settings → + New field → Single select: XS, S, M, L, XL</a:t>
+              <a:t>Plan table: + → Add field → Create a project field → Single select: XS to XL</a:t>
             </a:r>
             <a:endParaRPr lang="en-US" sz="1550" dirty="0"/>
           </a:p>

--- a/canvas_material/lectures/powerpoint/Session18-SizeFitOrder.pptx
+++ b/canvas_material/lectures/powerpoint/Session18-SizeFitOrder.pptx
@@ -1844,7 +1844,7 @@
           <a:p>
             <a:r>
               <a:rPr lang="en-US" dirty="0"/>
-              <a:t>Close in a minute or two. Say the one-liner. The slice statement is now the progress-demo script, and the next cut is already decided, so the midpoint check next Wednesday is a yes-or-no question: is the skateboard walking? Monday is MVP thinking and debugging, right before the heaviest build fortnight. Keep the Fit Check Sheet; it's a working copy, not a turn-in.</a:t>
+              <a:t>Close in a minute or two. Say the one-liner. The slice statement is now the progress-demo script, and the next cut is already decided, so the midpoint check next Wednesday is a yes-or-no question: is the skateboard walking? Then the build step, out loud: the skeleton from Monday merges this week, and the first slice issue is in progress on top of it before Monday. Show of hands on skeletons. Monday is MVP thinking and debugging, right before the heaviest build fortnight. Keep the Fit Check Sheet; it's a working copy, not a turn-in.</a:t>
             </a:r>
             <a:endParaRPr lang="en-US" dirty="0"/>
           </a:p>
@@ -19814,7 +19814,7 @@
                 <a:ea typeface="Calibri" pitchFamily="34" charset="-122"/>
                 <a:cs typeface="Calibri" pitchFamily="34" charset="-120"/>
               </a:rPr>
-              <a:t>Start the first slice issue; have it in progress before Monday</a:t>
+              <a:t>Merge your walking skeleton, then start the first slice issue on it; in progress before Monday</a:t>
             </a:r>
             <a:endParaRPr lang="en-US" sz="1700" dirty="0"/>
           </a:p>
